--- a/img/2.3.3.3.1.pptx
+++ b/img/2.3.3.3.1.pptx
@@ -104,6 +104,11 @@
       </a:defRPr>
     </a:lvl9pPr>
   </p:defaultTextStyle>
+  <p:extLst>
+    <p:ext uri="{EFAFB233-063F-42B5-8137-9DF3F51BA10A}">
+      <p15:sldGuideLst xmlns:p15="http://schemas.microsoft.com/office/powerpoint/2012/main"/>
+    </p:ext>
+  </p:extLst>
 </p:presentation>
 </file>
 
@@ -254,7 +259,7 @@
           <a:p>
             <a:fld id="{52F4AA46-B45F-4E51-8E8C-FECF7982271F}" type="datetimeFigureOut">
               <a:rPr lang="zh-CN" altLang="en-US" smtClean="0"/>
-              <a:t>2022/2/28</a:t>
+              <a:t>2022/6/17</a:t>
             </a:fld>
             <a:endParaRPr lang="zh-CN" altLang="en-US"/>
           </a:p>
@@ -452,7 +457,7 @@
           <a:p>
             <a:fld id="{52F4AA46-B45F-4E51-8E8C-FECF7982271F}" type="datetimeFigureOut">
               <a:rPr lang="zh-CN" altLang="en-US" smtClean="0"/>
-              <a:t>2022/2/28</a:t>
+              <a:t>2022/6/17</a:t>
             </a:fld>
             <a:endParaRPr lang="zh-CN" altLang="en-US"/>
           </a:p>
@@ -660,7 +665,7 @@
           <a:p>
             <a:fld id="{52F4AA46-B45F-4E51-8E8C-FECF7982271F}" type="datetimeFigureOut">
               <a:rPr lang="zh-CN" altLang="en-US" smtClean="0"/>
-              <a:t>2022/2/28</a:t>
+              <a:t>2022/6/17</a:t>
             </a:fld>
             <a:endParaRPr lang="zh-CN" altLang="en-US"/>
           </a:p>
@@ -858,7 +863,7 @@
           <a:p>
             <a:fld id="{52F4AA46-B45F-4E51-8E8C-FECF7982271F}" type="datetimeFigureOut">
               <a:rPr lang="zh-CN" altLang="en-US" smtClean="0"/>
-              <a:t>2022/2/28</a:t>
+              <a:t>2022/6/17</a:t>
             </a:fld>
             <a:endParaRPr lang="zh-CN" altLang="en-US"/>
           </a:p>
@@ -1133,7 +1138,7 @@
           <a:p>
             <a:fld id="{52F4AA46-B45F-4E51-8E8C-FECF7982271F}" type="datetimeFigureOut">
               <a:rPr lang="zh-CN" altLang="en-US" smtClean="0"/>
-              <a:t>2022/2/28</a:t>
+              <a:t>2022/6/17</a:t>
             </a:fld>
             <a:endParaRPr lang="zh-CN" altLang="en-US"/>
           </a:p>
@@ -1398,7 +1403,7 @@
           <a:p>
             <a:fld id="{52F4AA46-B45F-4E51-8E8C-FECF7982271F}" type="datetimeFigureOut">
               <a:rPr lang="zh-CN" altLang="en-US" smtClean="0"/>
-              <a:t>2022/2/28</a:t>
+              <a:t>2022/6/17</a:t>
             </a:fld>
             <a:endParaRPr lang="zh-CN" altLang="en-US"/>
           </a:p>
@@ -1810,7 +1815,7 @@
           <a:p>
             <a:fld id="{52F4AA46-B45F-4E51-8E8C-FECF7982271F}" type="datetimeFigureOut">
               <a:rPr lang="zh-CN" altLang="en-US" smtClean="0"/>
-              <a:t>2022/2/28</a:t>
+              <a:t>2022/6/17</a:t>
             </a:fld>
             <a:endParaRPr lang="zh-CN" altLang="en-US"/>
           </a:p>
@@ -1951,7 +1956,7 @@
           <a:p>
             <a:fld id="{52F4AA46-B45F-4E51-8E8C-FECF7982271F}" type="datetimeFigureOut">
               <a:rPr lang="zh-CN" altLang="en-US" smtClean="0"/>
-              <a:t>2022/2/28</a:t>
+              <a:t>2022/6/17</a:t>
             </a:fld>
             <a:endParaRPr lang="zh-CN" altLang="en-US"/>
           </a:p>
@@ -2064,7 +2069,7 @@
           <a:p>
             <a:fld id="{52F4AA46-B45F-4E51-8E8C-FECF7982271F}" type="datetimeFigureOut">
               <a:rPr lang="zh-CN" altLang="en-US" smtClean="0"/>
-              <a:t>2022/2/28</a:t>
+              <a:t>2022/6/17</a:t>
             </a:fld>
             <a:endParaRPr lang="zh-CN" altLang="en-US"/>
           </a:p>
@@ -2375,7 +2380,7 @@
           <a:p>
             <a:fld id="{52F4AA46-B45F-4E51-8E8C-FECF7982271F}" type="datetimeFigureOut">
               <a:rPr lang="zh-CN" altLang="en-US" smtClean="0"/>
-              <a:t>2022/2/28</a:t>
+              <a:t>2022/6/17</a:t>
             </a:fld>
             <a:endParaRPr lang="zh-CN" altLang="en-US"/>
           </a:p>
@@ -2663,7 +2668,7 @@
           <a:p>
             <a:fld id="{52F4AA46-B45F-4E51-8E8C-FECF7982271F}" type="datetimeFigureOut">
               <a:rPr lang="zh-CN" altLang="en-US" smtClean="0"/>
-              <a:t>2022/2/28</a:t>
+              <a:t>2022/6/17</a:t>
             </a:fld>
             <a:endParaRPr lang="zh-CN" altLang="en-US"/>
           </a:p>
@@ -2904,7 +2909,7 @@
           <a:p>
             <a:fld id="{52F4AA46-B45F-4E51-8E8C-FECF7982271F}" type="datetimeFigureOut">
               <a:rPr lang="zh-CN" altLang="en-US" smtClean="0"/>
-              <a:t>2022/2/28</a:t>
+              <a:t>2022/6/17</a:t>
             </a:fld>
             <a:endParaRPr lang="zh-CN" altLang="en-US"/>
           </a:p>
@@ -3878,7 +3883,7 @@
           <p:nvPr>
             <p:extLst>
               <p:ext uri="{D42A27DB-BD31-4B8C-83A1-F6EECF244321}">
-                <p14:modId xmlns:p14="http://schemas.microsoft.com/office/powerpoint/2010/main" val="2329591404"/>
+                <p14:modId xmlns:p14="http://schemas.microsoft.com/office/powerpoint/2010/main" val="746671995"/>
               </p:ext>
             </p:extLst>
           </p:nvPr>
@@ -4337,7 +4342,7 @@
                           <a:ea typeface="+mn-ea"/>
                           <a:cs typeface="+mn-cs"/>
                         </a:rPr>
-                        <a:t>2</a:t>
+                        <a:t>5</a:t>
                       </a:r>
                       <a:endParaRPr lang="zh-CN" altLang="en-US" sz="1800" b="0" kern="1200" baseline="-25000" dirty="0">
                         <a:solidFill>
@@ -7296,12 +7301,12 @@
           <a:graphicData uri="http://schemas.openxmlformats.org/presentationml/2006/ole">
             <mc:AlternateContent xmlns:mc="http://schemas.openxmlformats.org/markup-compatibility/2006">
               <mc:Choice xmlns:v="urn:schemas-microsoft-com:vml" Requires="v">
-                <p:oleObj spid="_x0000_s1032" name="Equation" r:id="rId3" imgW="152280" imgH="164880" progId="Equation.DSMT4">
+                <p:oleObj name="Equation" r:id="rId2" imgW="152280" imgH="164880" progId="Equation.DSMT4">
                   <p:embed/>
                 </p:oleObj>
               </mc:Choice>
               <mc:Fallback>
-                <p:oleObj name="Equation" r:id="rId3" imgW="152280" imgH="164880" progId="Equation.DSMT4">
+                <p:oleObj name="Equation" r:id="rId2" imgW="152280" imgH="164880" progId="Equation.DSMT4">
                   <p:embed/>
                   <p:pic>
                     <p:nvPicPr>
@@ -7310,7 +7315,7 @@
                       <p:nvPr/>
                     </p:nvPicPr>
                     <p:blipFill>
-                      <a:blip r:embed="rId4"/>
+                      <a:blip r:embed="rId3"/>
                       <a:stretch>
                         <a:fillRect/>
                       </a:stretch>
@@ -7359,12 +7364,12 @@
           <a:graphicData uri="http://schemas.openxmlformats.org/presentationml/2006/ole">
             <mc:AlternateContent xmlns:mc="http://schemas.openxmlformats.org/markup-compatibility/2006">
               <mc:Choice xmlns:v="urn:schemas-microsoft-com:vml" Requires="v">
-                <p:oleObj spid="_x0000_s1033" name="Equation" r:id="rId5" imgW="139680" imgH="177480" progId="Equation.DSMT4">
+                <p:oleObj name="Equation" r:id="rId4" imgW="139680" imgH="177480" progId="Equation.DSMT4">
                   <p:embed/>
                 </p:oleObj>
               </mc:Choice>
               <mc:Fallback>
-                <p:oleObj name="Equation" r:id="rId5" imgW="139680" imgH="177480" progId="Equation.DSMT4">
+                <p:oleObj name="Equation" r:id="rId4" imgW="139680" imgH="177480" progId="Equation.DSMT4">
                   <p:embed/>
                   <p:pic>
                     <p:nvPicPr>
@@ -7373,7 +7378,7 @@
                       <p:nvPr/>
                     </p:nvPicPr>
                     <p:blipFill>
-                      <a:blip r:embed="rId6"/>
+                      <a:blip r:embed="rId5"/>
                       <a:stretch>
                         <a:fillRect/>
                       </a:stretch>
